--- a/ho-tro-ngoai/bai-giang/06-Bien-chung-tiet-nieu-trong-san-khoa.pptx
+++ b/ho-tro-ngoai/bai-giang/06-Bien-chung-tiet-nieu-trong-san-khoa.pptx
@@ -126,7 +126,18 @@
   </p:defaultTextStyle>
   <p:extLst>
     <p:ext uri="{EFAFB233-063F-42B5-8137-9DF3F51BA10A}">
-      <p15:sldGuideLst xmlns:p15="http://schemas.microsoft.com/office/powerpoint/2012/main"/>
+      <p15:sldGuideLst xmlns:p15="http://schemas.microsoft.com/office/powerpoint/2012/main">
+        <p15:guide id="1" orient="horz" pos="2160" userDrawn="1">
+          <p15:clr>
+            <a:srgbClr val="A4A3A4"/>
+          </p15:clr>
+        </p15:guide>
+        <p15:guide id="2" pos="3840" userDrawn="1">
+          <p15:clr>
+            <a:srgbClr val="A4A3A4"/>
+          </p15:clr>
+        </p15:guide>
+      </p15:sldGuideLst>
     </p:ext>
   </p:extLst>
 </p:presentation>
@@ -406,7 +417,7 @@
           <a:p>
             <a:fld id="{78ABE3C1-DBE1-495D-B57B-2849774B866A}" type="datetimeFigureOut">
               <a:rPr lang="en-US" dirty="0"/>
-              <a:t>10/21/2026</a:t>
+              <a:t>10/29/2026</a:t>
             </a:fld>
             <a:endParaRPr lang="en-US" dirty="0"/>
           </a:p>
@@ -815,7 +826,7 @@
           <a:p>
             <a:fld id="{446C117F-5CCF-4837-BE5F-2B92066CAFAF}" type="datetimeFigureOut">
               <a:rPr lang="en-US" dirty="0"/>
-              <a:t>10/21/2026</a:t>
+              <a:t>10/29/2026</a:t>
             </a:fld>
             <a:endParaRPr lang="en-US" dirty="0"/>
           </a:p>
@@ -1146,7 +1157,7 @@
           <a:p>
             <a:fld id="{84EB90BD-B6CE-46B7-997F-7313B992CCDC}" type="datetimeFigureOut">
               <a:rPr lang="en-US" dirty="0"/>
-              <a:t>10/21/2026</a:t>
+              <a:t>10/29/2026</a:t>
             </a:fld>
             <a:endParaRPr lang="en-US" dirty="0"/>
           </a:p>
@@ -1546,7 +1557,7 @@
           <a:p>
             <a:fld id="{CDB9D11F-B188-461D-B23F-39381795C052}" type="datetimeFigureOut">
               <a:rPr lang="en-US" dirty="0"/>
-              <a:t>10/21/2026</a:t>
+              <a:t>10/29/2026</a:t>
             </a:fld>
             <a:endParaRPr lang="en-US" dirty="0"/>
           </a:p>
@@ -2109,7 +2120,7 @@
           <a:p>
             <a:fld id="{52E6D8D9-55A2-4063-B0F3-121F44549695}" type="datetimeFigureOut">
               <a:rPr lang="en-US" dirty="0"/>
-              <a:t>10/21/2026</a:t>
+              <a:t>10/29/2026</a:t>
             </a:fld>
             <a:endParaRPr lang="en-US" dirty="0"/>
           </a:p>
@@ -2785,7 +2796,7 @@
           <a:p>
             <a:fld id="{D4B24536-994D-4021-A283-9F449C0DB509}" type="datetimeFigureOut">
               <a:rPr lang="en-US" dirty="0"/>
-              <a:t>10/21/2026</a:t>
+              <a:t>10/29/2026</a:t>
             </a:fld>
             <a:endParaRPr lang="en-US" dirty="0"/>
           </a:p>
@@ -3693,7 +3704,7 @@
           <a:p>
             <a:fld id="{3CBBBB78-C96F-47B7-AB17-D852CA960AC9}" type="datetimeFigureOut">
               <a:rPr lang="en-US" dirty="0"/>
-              <a:t>10/21/2026</a:t>
+              <a:t>10/29/2026</a:t>
             </a:fld>
             <a:endParaRPr lang="en-US" dirty="0"/>
           </a:p>
@@ -4001,7 +4012,7 @@
           <a:p>
             <a:fld id="{1FA3F48C-C7C6-4055-9F49-3777875E72AE}" type="datetimeFigureOut">
               <a:rPr lang="en-US" dirty="0"/>
-              <a:t>10/21/2026</a:t>
+              <a:t>10/29/2026</a:t>
             </a:fld>
             <a:endParaRPr lang="en-US" dirty="0"/>
           </a:p>
@@ -4260,7 +4271,7 @@
           <a:p>
             <a:fld id="{6178E61D-D431-422C-9764-11DAFE33AB63}" type="datetimeFigureOut">
               <a:rPr lang="en-US" dirty="0"/>
-              <a:t>10/21/2026</a:t>
+              <a:t>10/29/2026</a:t>
             </a:fld>
             <a:endParaRPr lang="en-US" dirty="0"/>
           </a:p>
@@ -4579,7 +4590,7 @@
           <a:p>
             <a:fld id="{12DE42F4-6EEF-4EF7-8ED4-2208F0F89A08}" type="datetimeFigureOut">
               <a:rPr lang="en-US" dirty="0"/>
-              <a:t>10/21/2026</a:t>
+              <a:t>10/29/2026</a:t>
             </a:fld>
             <a:endParaRPr lang="en-US" dirty="0"/>
           </a:p>
@@ -4963,7 +4974,7 @@
           <a:p>
             <a:fld id="{30578ACC-22D6-47C1-A373-4FD133E34F3C}" type="datetimeFigureOut">
               <a:rPr lang="en-US" dirty="0"/>
-              <a:t>10/21/2026</a:t>
+              <a:t>10/29/2026</a:t>
             </a:fld>
             <a:endParaRPr lang="en-US" dirty="0"/>
           </a:p>
@@ -5334,7 +5345,7 @@
           <a:p>
             <a:fld id="{4E5A6C69-6797-4E8A-BF37-F2C3751466E9}" type="datetimeFigureOut">
               <a:rPr lang="en-US" dirty="0"/>
-              <a:t>10/21/2026</a:t>
+              <a:t>10/29/2026</a:t>
             </a:fld>
             <a:endParaRPr lang="en-US" dirty="0"/>
           </a:p>
@@ -5835,7 +5846,7 @@
           <a:p>
             <a:fld id="{D82014A1-A632-4878-A0D3-F52BA7563730}" type="datetimeFigureOut">
               <a:rPr lang="en-US" dirty="0"/>
-              <a:t>10/21/2026</a:t>
+              <a:t>10/29/2026</a:t>
             </a:fld>
             <a:endParaRPr lang="en-US" dirty="0"/>
           </a:p>
@@ -6087,7 +6098,7 @@
           <a:p>
             <a:fld id="{CE99F462-093F-4566-844B-4C71F2739DA5}" type="datetimeFigureOut">
               <a:rPr lang="en-US" dirty="0"/>
-              <a:t>10/21/2026</a:t>
+              <a:t>10/29/2026</a:t>
             </a:fld>
             <a:endParaRPr lang="en-US" dirty="0"/>
           </a:p>
@@ -6245,7 +6256,7 @@
           <a:p>
             <a:fld id="{3D24A7AC-904D-4781-85BA-7D10C17ED021}" type="datetimeFigureOut">
               <a:rPr lang="en-US" dirty="0"/>
-              <a:t>10/21/2026</a:t>
+              <a:t>10/29/2026</a:t>
             </a:fld>
             <a:endParaRPr lang="en-US" dirty="0"/>
           </a:p>
@@ -6630,7 +6641,7 @@
           <a:p>
             <a:fld id="{E331444B-B92B-4E27-8C94-BB93EAF5CB18}" type="datetimeFigureOut">
               <a:rPr lang="en-US" dirty="0"/>
-              <a:t>10/21/2026</a:t>
+              <a:t>10/29/2026</a:t>
             </a:fld>
             <a:endParaRPr lang="en-US" dirty="0"/>
           </a:p>
@@ -7034,7 +7045,7 @@
           <a:p>
             <a:fld id="{363EFA5E-FA76-400D-B3DC-F0BA90E6D107}" type="datetimeFigureOut">
               <a:rPr lang="en-US" dirty="0"/>
-              <a:t>10/21/2026</a:t>
+              <a:t>10/29/2026</a:t>
             </a:fld>
             <a:endParaRPr lang="en-US" dirty="0"/>
           </a:p>
@@ -7273,7 +7284,7 @@
           <a:p>
             <a:fld id="{9D6E9DEC-419B-4CC5-A080-3B06BD5A8291}" type="datetimeFigureOut">
               <a:rPr lang="en-US" dirty="0"/>
-              <a:t>10/21/2026</a:t>
+              <a:t>10/29/2026</a:t>
             </a:fld>
             <a:endParaRPr lang="en-US" dirty="0"/>
           </a:p>
@@ -25242,7 +25253,7 @@
                 <a:ea typeface="Times New Roman" panose="02020603050405020304" pitchFamily="18" charset="0"/>
                 <a:cs typeface="Times New Roman" panose="02020603050405020304" pitchFamily="18" charset="0"/>
               </a:rPr>
-              <a:t> Simon ( 1869) </a:t>
+              <a:t> Simon (1869) </a:t>
             </a:r>
             <a:r>
               <a:rPr lang="en-US" dirty="0" err="1">
@@ -25786,7 +25797,7 @@
                 <a:ea typeface="Times New Roman" panose="02020603050405020304" pitchFamily="18" charset="0"/>
                 <a:cs typeface="Times New Roman" panose="02020603050405020304" pitchFamily="18" charset="0"/>
               </a:rPr>
-              <a:t>Theo R. Couvelaire (1953) “ </a:t>
+              <a:t>Theo R. Couvelaire (1953) “</a:t>
             </a:r>
             <a:r>
               <a:rPr lang="en-US" dirty="0" err="1">
